--- a/materials/presentation_drafts/presentation_20260627.pptx
+++ b/materials/presentation_drafts/presentation_20260627.pptx
@@ -228,7 +228,7 @@
           <a:p>
             <a:fld id="{3443883D-613B-449A-8E41-D9D863F486E3}" type="datetimeFigureOut">
               <a:rPr kumimoji="1" lang="ja-JP" altLang="en-US" smtClean="0"/>
-              <a:t>2026/9/29</a:t>
+              <a:t>2026/10/3</a:t>
             </a:fld>
             <a:endParaRPr kumimoji="1" lang="ja-JP" altLang="en-US"/>
           </a:p>
@@ -4612,15 +4612,25 @@
               <a:buNone/>
             </a:pPr>
             <a:r>
-              <a:rPr lang="en-US" sz="2800" b="1">
-                <a:solidFill>
-                  <a:srgbClr val="15182A"/>
-                </a:solidFill>
-                <a:latin typeface="Meiryo UI" panose="020B0604030504040204" pitchFamily="50" charset="-128"/>
-                <a:ea typeface="Meiryo UI" panose="020B0604030504040204" pitchFamily="50" charset="-128"/>
-                <a:cs typeface="Arial" pitchFamily="34" charset="-120"/>
-              </a:rPr>
-              <a:t>高橋 朋子</a:t>
+              <a:rPr lang="en-US" altLang="ja-JP" sz="2800">
+                <a:latin typeface="Meiryo UI" panose="020B0604030504040204" pitchFamily="50" charset="-128"/>
+                <a:ea typeface="Meiryo UI" panose="020B0604030504040204" pitchFamily="50" charset="-128"/>
+              </a:rPr>
+              <a:t>XX</a:t>
+            </a:r>
+            <a:r>
+              <a:rPr lang="ja-JP" altLang="en-US" sz="2800">
+                <a:latin typeface="Meiryo UI" panose="020B0604030504040204" pitchFamily="50" charset="-128"/>
+                <a:ea typeface="Meiryo UI" panose="020B0604030504040204" pitchFamily="50" charset="-128"/>
+              </a:rPr>
+              <a:t>　</a:t>
+            </a:r>
+            <a:r>
+              <a:rPr lang="en-US" altLang="ja-JP" sz="2800">
+                <a:latin typeface="Meiryo UI" panose="020B0604030504040204" pitchFamily="50" charset="-128"/>
+                <a:ea typeface="Meiryo UI" panose="020B0604030504040204" pitchFamily="50" charset="-128"/>
+              </a:rPr>
+              <a:t>XX</a:t>
             </a:r>
             <a:endParaRPr lang="en-US" sz="2800">
               <a:latin typeface="Meiryo UI" panose="020B0604030504040204" pitchFamily="50" charset="-128"/>
@@ -4664,7 +4674,39 @@
                 <a:ea typeface="Meiryo UI" panose="020B0604030504040204" pitchFamily="50" charset="-128"/>
                 <a:cs typeface="Arial" pitchFamily="34" charset="-120"/>
               </a:rPr>
-              <a:t>Takahashi Tomoko</a:t>
+              <a:t>T</a:t>
+            </a:r>
+            <a:r>
+              <a:rPr lang="en-US" altLang="ja-JP" sz="1350">
+                <a:solidFill>
+                  <a:srgbClr val="6F7388"/>
+                </a:solidFill>
+                <a:latin typeface="Meiryo UI" panose="020B0604030504040204" pitchFamily="50" charset="-128"/>
+                <a:ea typeface="Meiryo UI" panose="020B0604030504040204" pitchFamily="50" charset="-128"/>
+                <a:cs typeface="Arial" pitchFamily="34" charset="-120"/>
+              </a:rPr>
+              <a:t>XXXX</a:t>
+            </a:r>
+            <a:br>
+              <a:rPr lang="en-US" altLang="ja-JP" sz="1350">
+                <a:solidFill>
+                  <a:srgbClr val="6F7388"/>
+                </a:solidFill>
+                <a:latin typeface="Meiryo UI" panose="020B0604030504040204" pitchFamily="50" charset="-128"/>
+                <a:ea typeface="Meiryo UI" panose="020B0604030504040204" pitchFamily="50" charset="-128"/>
+                <a:cs typeface="Arial" pitchFamily="34" charset="-120"/>
+              </a:rPr>
+            </a:br>
+            <a:r>
+              <a:rPr lang="en-US" altLang="ja-JP" sz="1350">
+                <a:solidFill>
+                  <a:srgbClr val="6F7388"/>
+                </a:solidFill>
+                <a:latin typeface="Meiryo UI" panose="020B0604030504040204" pitchFamily="50" charset="-128"/>
+                <a:ea typeface="Meiryo UI" panose="020B0604030504040204" pitchFamily="50" charset="-128"/>
+                <a:cs typeface="Arial" pitchFamily="34" charset="-120"/>
+              </a:rPr>
+              <a:t>XXXXX</a:t>
             </a:r>
             <a:endParaRPr lang="en-US" sz="1350">
               <a:latin typeface="Meiryo UI" panose="020B0604030504040204" pitchFamily="50" charset="-128"/>
